--- a/src/main/resources/static/plantillas/test1Modificado.pptx
+++ b/src/main/resources/static/plantillas/test1Modificado.pptx
@@ -36,7 +36,7 @@
             <a:spLocks noGrp="1"/>
           </p:cNvSpPr>
           <p:nvPr>
-            <p:ph type="ftr" idx="2"/>
+            <p:ph type="ftr" idx="1"/>
           </p:nvPr>
         </p:nvSpPr>
         <p:spPr/>
@@ -56,14 +56,14 @@
             <a:spLocks noGrp="1"/>
           </p:cNvSpPr>
           <p:nvPr>
-            <p:ph type="sldNum" idx="3"/>
+            <p:ph type="sldNum" idx="2"/>
           </p:nvPr>
         </p:nvSpPr>
         <p:spPr/>
         <p:txBody>
           <a:bodyPr/>
           <a:p>
-            <a:fld id="{739A343B-91C2-4D06-B153-F8685CEBAEEF}" type="slidenum">
+            <a:fld id="{C1A3CC1C-E285-4608-8E8E-49946FB985A1}" type="slidenum">
               <a:t>&lt;#&gt;</a:t>
             </a:fld>
           </a:p>
@@ -76,7 +76,7 @@
             <a:spLocks noGrp="1"/>
           </p:cNvSpPr>
           <p:nvPr>
-            <p:ph type="dt" idx="1"/>
+            <p:ph type="dt" idx="3"/>
           </p:nvPr>
         </p:nvSpPr>
         <p:spPr/>
@@ -119,13 +119,13 @@
             <a:spLocks noGrp="1"/>
           </p:cNvSpPr>
           <p:nvPr>
-            <p:ph type="title"/>
+            <p:ph type="ftr" idx="1"/>
           </p:nvPr>
         </p:nvSpPr>
         <p:spPr>
           <a:xfrm>
-            <a:off x="504000" y="226080"/>
-            <a:ext cx="9071640" cy="946440"/>
+            <a:off x="3447360" y="5165280"/>
+            <a:ext cx="3194280" cy="389880"/>
           </a:xfrm>
           <a:prstGeom prst="rect">
             <a:avLst/>
@@ -136,29 +136,53 @@
           </a:ln>
         </p:spPr>
         <p:txBody>
-          <a:bodyPr lIns="0" rIns="0" tIns="0" bIns="0" anchor="ctr">
+          <a:bodyPr lIns="0" rIns="0" tIns="0" bIns="0" anchor="t">
             <a:noAutofit/>
           </a:bodyPr>
+          <a:lstStyle>
+            <a:lvl1pPr indent="0" algn="ctr">
+              <a:lnSpc>
+                <a:spcPct val="100000"/>
+              </a:lnSpc>
+              <a:buNone/>
+              <a:tabLst>
+                <a:tab algn="l" pos="0"/>
+              </a:tabLst>
+              <a:defRPr b="0" lang="es-MX" sz="1400" strike="noStrike" u="none">
+                <a:solidFill>
+                  <a:srgbClr val="000000"/>
+                </a:solidFill>
+                <a:uFillTx/>
+                <a:latin typeface="Times New Roman"/>
+              </a:defRPr>
+            </a:lvl1pPr>
+          </a:lstStyle>
           <a:p>
             <a:pPr indent="0" algn="ctr">
+              <a:lnSpc>
+                <a:spcPct val="100000"/>
+              </a:lnSpc>
               <a:buNone/>
-            </a:pPr>
-            <a:r>
-              <a:rPr b="0" lang="es-MX" sz="4400" strike="noStrike" u="none">
-                <a:solidFill>
-                  <a:srgbClr val="000000"/>
-                </a:solidFill>
-                <a:uFillTx/>
-                <a:latin typeface="Arial"/>
-              </a:rPr>
-              <a:t>Click to edit the title text format</a:t>
-            </a:r>
-            <a:endParaRPr b="0" lang="es-MX" sz="4400" strike="noStrike" u="none">
-              <a:solidFill>
-                <a:srgbClr val="000000"/>
-              </a:solidFill>
-              <a:uFillTx/>
-              <a:latin typeface="Arial"/>
+              <a:tabLst>
+                <a:tab algn="l" pos="0"/>
+              </a:tabLst>
+            </a:pPr>
+            <a:r>
+              <a:rPr b="0" lang="es-MX" sz="1400" strike="noStrike" u="none">
+                <a:solidFill>
+                  <a:srgbClr val="000000"/>
+                </a:solidFill>
+                <a:uFillTx/>
+                <a:latin typeface="Times New Roman"/>
+              </a:rPr>
+              <a:t>&lt;footer&gt;</a:t>
+            </a:r>
+            <a:endParaRPr b="0" lang="es-MX" sz="1400" strike="noStrike" u="none">
+              <a:solidFill>
+                <a:srgbClr val="000000"/>
+              </a:solidFill>
+              <a:uFillTx/>
+              <a:latin typeface="Times New Roman"/>
             </a:endParaRPr>
           </a:p>
         </p:txBody>
@@ -170,13 +194,13 @@
             <a:spLocks noGrp="1"/>
           </p:cNvSpPr>
           <p:nvPr>
-            <p:ph type="body"/>
+            <p:ph type="sldNum" idx="2"/>
           </p:nvPr>
         </p:nvSpPr>
         <p:spPr>
           <a:xfrm>
-            <a:off x="504000" y="1326600"/>
-            <a:ext cx="9071640" cy="3288240"/>
+            <a:off x="7227360" y="5165280"/>
+            <a:ext cx="2347560" cy="389880"/>
           </a:xfrm>
           <a:prstGeom prst="rect">
             <a:avLst/>
@@ -188,216 +212,52 @@
         </p:spPr>
         <p:txBody>
           <a:bodyPr lIns="0" rIns="0" tIns="0" bIns="0" anchor="t">
-            <a:normAutofit/>
+            <a:noAutofit/>
           </a:bodyPr>
-          <a:p>
-            <a:pPr marL="432000" indent="-324000">
-              <a:spcBef>
-                <a:spcPts val="1417"/>
-              </a:spcBef>
-              <a:buClr>
-                <a:srgbClr val="000000"/>
-              </a:buClr>
-              <a:buSzPct val="45000"/>
-              <a:buFont typeface="Wingdings" charset="2"/>
-              <a:buChar char=""/>
-            </a:pPr>
-            <a:r>
-              <a:rPr b="0" lang="es-MX" sz="3200" strike="noStrike" u="none">
-                <a:solidFill>
-                  <a:srgbClr val="000000"/>
-                </a:solidFill>
-                <a:uFillTx/>
-                <a:latin typeface="Arial"/>
-              </a:rPr>
-              <a:t>Click to edit the outline text format</a:t>
-            </a:r>
-            <a:endParaRPr b="0" lang="es-MX" sz="3200" strike="noStrike" u="none">
-              <a:solidFill>
-                <a:srgbClr val="000000"/>
-              </a:solidFill>
-              <a:uFillTx/>
-              <a:latin typeface="Arial"/>
-            </a:endParaRPr>
-          </a:p>
-          <a:p>
-            <a:pPr lvl="1" marL="864000" indent="-324000">
-              <a:spcBef>
-                <a:spcPts val="1134"/>
-              </a:spcBef>
-              <a:buClr>
-                <a:srgbClr val="000000"/>
-              </a:buClr>
-              <a:buSzPct val="75000"/>
-              <a:buFont typeface="Symbol" charset="2"/>
-              <a:buChar char=""/>
-            </a:pPr>
-            <a:r>
-              <a:rPr b="0" lang="es-MX" sz="2800" strike="noStrike" u="none">
-                <a:solidFill>
-                  <a:srgbClr val="000000"/>
-                </a:solidFill>
-                <a:uFillTx/>
-                <a:latin typeface="Arial"/>
-              </a:rPr>
-              <a:t>Second Outline Level</a:t>
-            </a:r>
-            <a:endParaRPr b="0" lang="es-MX" sz="2800" strike="noStrike" u="none">
-              <a:solidFill>
-                <a:srgbClr val="000000"/>
-              </a:solidFill>
-              <a:uFillTx/>
-              <a:latin typeface="Arial"/>
-            </a:endParaRPr>
-          </a:p>
-          <a:p>
-            <a:pPr lvl="2" marL="1296000" indent="-288000">
-              <a:spcBef>
-                <a:spcPts val="850"/>
-              </a:spcBef>
-              <a:buClr>
-                <a:srgbClr val="000000"/>
-              </a:buClr>
-              <a:buSzPct val="45000"/>
-              <a:buFont typeface="Wingdings" charset="2"/>
-              <a:buChar char=""/>
-            </a:pPr>
-            <a:r>
-              <a:rPr b="0" lang="es-MX" sz="2400" strike="noStrike" u="none">
-                <a:solidFill>
-                  <a:srgbClr val="000000"/>
-                </a:solidFill>
-                <a:uFillTx/>
-                <a:latin typeface="Arial"/>
-              </a:rPr>
-              <a:t>Third Outline Level</a:t>
-            </a:r>
-            <a:endParaRPr b="0" lang="es-MX" sz="2400" strike="noStrike" u="none">
-              <a:solidFill>
-                <a:srgbClr val="000000"/>
-              </a:solidFill>
-              <a:uFillTx/>
-              <a:latin typeface="Arial"/>
-            </a:endParaRPr>
-          </a:p>
-          <a:p>
-            <a:pPr lvl="3" marL="1728000" indent="-216000">
-              <a:spcBef>
-                <a:spcPts val="567"/>
-              </a:spcBef>
-              <a:buClr>
-                <a:srgbClr val="000000"/>
-              </a:buClr>
-              <a:buSzPct val="75000"/>
-              <a:buFont typeface="Symbol" charset="2"/>
-              <a:buChar char=""/>
-            </a:pPr>
-            <a:r>
-              <a:rPr b="0" lang="es-MX" sz="2000" strike="noStrike" u="none">
-                <a:solidFill>
-                  <a:srgbClr val="000000"/>
-                </a:solidFill>
-                <a:uFillTx/>
-                <a:latin typeface="Arial"/>
-              </a:rPr>
-              <a:t>Fourth Outline Level</a:t>
-            </a:r>
-            <a:endParaRPr b="0" lang="es-MX" sz="2000" strike="noStrike" u="none">
-              <a:solidFill>
-                <a:srgbClr val="000000"/>
-              </a:solidFill>
-              <a:uFillTx/>
-              <a:latin typeface="Arial"/>
-            </a:endParaRPr>
-          </a:p>
-          <a:p>
-            <a:pPr lvl="4" marL="2160000" indent="-216000">
-              <a:spcBef>
-                <a:spcPts val="283"/>
-              </a:spcBef>
-              <a:buClr>
-                <a:srgbClr val="000000"/>
-              </a:buClr>
-              <a:buSzPct val="45000"/>
-              <a:buFont typeface="Wingdings" charset="2"/>
-              <a:buChar char=""/>
-            </a:pPr>
-            <a:r>
-              <a:rPr b="0" lang="es-MX" sz="2000" strike="noStrike" u="none">
-                <a:solidFill>
-                  <a:srgbClr val="000000"/>
-                </a:solidFill>
-                <a:uFillTx/>
-                <a:latin typeface="Arial"/>
-              </a:rPr>
-              <a:t>Fifth Outline Level</a:t>
-            </a:r>
-            <a:endParaRPr b="0" lang="es-MX" sz="2000" strike="noStrike" u="none">
-              <a:solidFill>
-                <a:srgbClr val="000000"/>
-              </a:solidFill>
-              <a:uFillTx/>
-              <a:latin typeface="Arial"/>
-            </a:endParaRPr>
-          </a:p>
-          <a:p>
-            <a:pPr lvl="5" marL="2592000" indent="-216000">
-              <a:spcBef>
-                <a:spcPts val="283"/>
-              </a:spcBef>
-              <a:buClr>
-                <a:srgbClr val="000000"/>
-              </a:buClr>
-              <a:buSzPct val="45000"/>
-              <a:buFont typeface="Wingdings" charset="2"/>
-              <a:buChar char=""/>
-            </a:pPr>
-            <a:r>
-              <a:rPr b="0" lang="es-MX" sz="2000" strike="noStrike" u="none">
-                <a:solidFill>
-                  <a:srgbClr val="000000"/>
-                </a:solidFill>
-                <a:uFillTx/>
-                <a:latin typeface="Arial"/>
-              </a:rPr>
-              <a:t>Sixth Outline Level</a:t>
-            </a:r>
-            <a:endParaRPr b="0" lang="es-MX" sz="2000" strike="noStrike" u="none">
-              <a:solidFill>
-                <a:srgbClr val="000000"/>
-              </a:solidFill>
-              <a:uFillTx/>
-              <a:latin typeface="Arial"/>
-            </a:endParaRPr>
-          </a:p>
-          <a:p>
-            <a:pPr lvl="6" marL="3024000" indent="-216000">
-              <a:spcBef>
-                <a:spcPts val="283"/>
-              </a:spcBef>
-              <a:buClr>
-                <a:srgbClr val="000000"/>
-              </a:buClr>
-              <a:buSzPct val="45000"/>
-              <a:buFont typeface="Wingdings" charset="2"/>
-              <a:buChar char=""/>
-            </a:pPr>
-            <a:r>
-              <a:rPr b="0" lang="es-MX" sz="2000" strike="noStrike" u="none">
-                <a:solidFill>
-                  <a:srgbClr val="000000"/>
-                </a:solidFill>
-                <a:uFillTx/>
-                <a:latin typeface="Arial"/>
-              </a:rPr>
-              <a:t>Seventh Outline Level</a:t>
-            </a:r>
-            <a:endParaRPr b="0" lang="es-MX" sz="2000" strike="noStrike" u="none">
-              <a:solidFill>
-                <a:srgbClr val="000000"/>
-              </a:solidFill>
-              <a:uFillTx/>
-              <a:latin typeface="Arial"/>
+          <a:lstStyle>
+            <a:lvl1pPr indent="0" algn="r">
+              <a:lnSpc>
+                <a:spcPct val="100000"/>
+              </a:lnSpc>
+              <a:buNone/>
+              <a:tabLst>
+                <a:tab algn="l" pos="0"/>
+              </a:tabLst>
+              <a:defRPr b="0" lang="es-MX" sz="1400" strike="noStrike" u="none">
+                <a:solidFill>
+                  <a:srgbClr val="000000"/>
+                </a:solidFill>
+                <a:uFillTx/>
+                <a:latin typeface="Times New Roman"/>
+              </a:defRPr>
+            </a:lvl1pPr>
+          </a:lstStyle>
+          <a:p>
+            <a:pPr indent="0" algn="r">
+              <a:lnSpc>
+                <a:spcPct val="100000"/>
+              </a:lnSpc>
+              <a:buNone/>
+              <a:tabLst>
+                <a:tab algn="l" pos="0"/>
+              </a:tabLst>
+            </a:pPr>
+            <a:fld id="{80A34051-97A3-41AB-9201-86D6BDC15AF7}" type="slidenum">
+              <a:rPr b="0" lang="es-MX" sz="1400" strike="noStrike" u="none">
+                <a:solidFill>
+                  <a:srgbClr val="000000"/>
+                </a:solidFill>
+                <a:uFillTx/>
+                <a:latin typeface="Times New Roman"/>
+              </a:rPr>
+              <a:t>&lt;number&gt;</a:t>
+            </a:fld>
+            <a:endParaRPr b="0" lang="es-MX" sz="1400" strike="noStrike" u="none">
+              <a:solidFill>
+                <a:srgbClr val="000000"/>
+              </a:solidFill>
+              <a:uFillTx/>
+              <a:latin typeface="Times New Roman"/>
             </a:endParaRPr>
           </a:p>
         </p:txBody>
@@ -409,13 +269,13 @@
             <a:spLocks noGrp="1"/>
           </p:cNvSpPr>
           <p:nvPr>
-            <p:ph type="dt" idx="1"/>
+            <p:ph type="dt" idx="3"/>
           </p:nvPr>
         </p:nvSpPr>
         <p:spPr>
           <a:xfrm>
             <a:off x="504000" y="5165280"/>
-            <a:ext cx="2348280" cy="390600"/>
+            <a:ext cx="2347560" cy="389880"/>
           </a:xfrm>
           <a:prstGeom prst="rect">
             <a:avLst/>
@@ -472,13 +332,13 @@
             <a:spLocks noGrp="1"/>
           </p:cNvSpPr>
           <p:nvPr>
-            <p:ph type="ftr" idx="2"/>
+            <p:ph type="title"/>
           </p:nvPr>
         </p:nvSpPr>
         <p:spPr>
           <a:xfrm>
-            <a:off x="3447360" y="5165280"/>
-            <a:ext cx="3195000" cy="390600"/>
+            <a:off x="504000" y="226080"/>
+            <a:ext cx="9072000" cy="946440"/>
           </a:xfrm>
           <a:prstGeom prst="rect">
             <a:avLst/>
@@ -489,41 +349,29 @@
           </a:ln>
         </p:spPr>
         <p:txBody>
-          <a:bodyPr lIns="0" rIns="0" tIns="0" bIns="0" anchor="t">
+          <a:bodyPr lIns="0" rIns="0" tIns="0" bIns="0" anchor="ctr">
             <a:noAutofit/>
           </a:bodyPr>
-          <a:lstStyle>
-            <a:lvl1pPr indent="0" algn="ctr">
-              <a:buNone/>
-              <a:defRPr b="0" lang="es-MX" sz="1400" strike="noStrike" u="none">
-                <a:solidFill>
-                  <a:srgbClr val="000000"/>
-                </a:solidFill>
-                <a:uFillTx/>
-                <a:latin typeface="Times New Roman"/>
-              </a:defRPr>
-            </a:lvl1pPr>
-          </a:lstStyle>
           <a:p>
             <a:pPr indent="0" algn="ctr">
               <a:buNone/>
             </a:pPr>
             <a:r>
-              <a:rPr b="0" lang="es-MX" sz="1400" strike="noStrike" u="none">
-                <a:solidFill>
-                  <a:srgbClr val="000000"/>
-                </a:solidFill>
-                <a:uFillTx/>
-                <a:latin typeface="Times New Roman"/>
-              </a:rPr>
-              <a:t>&lt;footer&gt;</a:t>
-            </a:r>
-            <a:endParaRPr b="0" lang="es-MX" sz="1400" strike="noStrike" u="none">
-              <a:solidFill>
-                <a:srgbClr val="000000"/>
-              </a:solidFill>
-              <a:uFillTx/>
-              <a:latin typeface="Times New Roman"/>
+              <a:rPr b="0" lang="es-MX" sz="4400" strike="noStrike" u="none">
+                <a:solidFill>
+                  <a:srgbClr val="000000"/>
+                </a:solidFill>
+                <a:uFillTx/>
+                <a:latin typeface="Arial"/>
+              </a:rPr>
+              <a:t>Click to edit the title text format</a:t>
+            </a:r>
+            <a:endParaRPr b="0" lang="es-MX" sz="4400" strike="noStrike" u="none">
+              <a:solidFill>
+                <a:srgbClr val="000000"/>
+              </a:solidFill>
+              <a:uFillTx/>
+              <a:latin typeface="Arial"/>
             </a:endParaRPr>
           </a:p>
         </p:txBody>
@@ -535,13 +383,13 @@
             <a:spLocks noGrp="1"/>
           </p:cNvSpPr>
           <p:nvPr>
-            <p:ph type="sldNum" idx="3"/>
+            <p:ph type="body"/>
           </p:nvPr>
         </p:nvSpPr>
         <p:spPr>
           <a:xfrm>
-            <a:off x="7227360" y="5165280"/>
-            <a:ext cx="2348280" cy="390600"/>
+            <a:off x="504000" y="1326600"/>
+            <a:ext cx="9072000" cy="3288600"/>
           </a:xfrm>
           <a:prstGeom prst="rect">
             <a:avLst/>
@@ -553,40 +401,216 @@
         </p:spPr>
         <p:txBody>
           <a:bodyPr lIns="0" rIns="0" tIns="0" bIns="0" anchor="t">
-            <a:noAutofit/>
+            <a:normAutofit/>
           </a:bodyPr>
-          <a:lstStyle>
-            <a:lvl1pPr indent="0" algn="r">
-              <a:buNone/>
-              <a:defRPr b="0" lang="es-MX" sz="1400" strike="noStrike" u="none">
-                <a:solidFill>
-                  <a:srgbClr val="000000"/>
-                </a:solidFill>
-                <a:uFillTx/>
-                <a:latin typeface="Times New Roman"/>
-              </a:defRPr>
-            </a:lvl1pPr>
-          </a:lstStyle>
-          <a:p>
-            <a:pPr indent="0" algn="r">
-              <a:buNone/>
-            </a:pPr>
-            <a:fld id="{6C4DFC56-0C70-48FE-9568-4FA54CBA5DFF}" type="slidenum">
-              <a:rPr b="0" lang="es-MX" sz="1400" strike="noStrike" u="none">
-                <a:solidFill>
-                  <a:srgbClr val="000000"/>
-                </a:solidFill>
-                <a:uFillTx/>
-                <a:latin typeface="Times New Roman"/>
-              </a:rPr>
-              <a:t>&lt;number&gt;</a:t>
-            </a:fld>
-            <a:endParaRPr b="0" lang="es-MX" sz="1400" strike="noStrike" u="none">
-              <a:solidFill>
-                <a:srgbClr val="000000"/>
-              </a:solidFill>
-              <a:uFillTx/>
-              <a:latin typeface="Times New Roman"/>
+          <a:p>
+            <a:pPr marL="432000" indent="-324000">
+              <a:spcBef>
+                <a:spcPts val="1417"/>
+              </a:spcBef>
+              <a:buClr>
+                <a:srgbClr val="000000"/>
+              </a:buClr>
+              <a:buSzPct val="45000"/>
+              <a:buFont typeface="Wingdings" charset="2"/>
+              <a:buChar char=""/>
+            </a:pPr>
+            <a:r>
+              <a:rPr b="0" lang="es-MX" sz="3200" strike="noStrike" u="none">
+                <a:solidFill>
+                  <a:srgbClr val="000000"/>
+                </a:solidFill>
+                <a:uFillTx/>
+                <a:latin typeface="Arial"/>
+              </a:rPr>
+              <a:t>Click to edit the outline text format</a:t>
+            </a:r>
+            <a:endParaRPr b="0" lang="es-MX" sz="3200" strike="noStrike" u="none">
+              <a:solidFill>
+                <a:srgbClr val="000000"/>
+              </a:solidFill>
+              <a:uFillTx/>
+              <a:latin typeface="Arial"/>
+            </a:endParaRPr>
+          </a:p>
+          <a:p>
+            <a:pPr lvl="1" marL="864000" indent="-324000">
+              <a:spcBef>
+                <a:spcPts val="1134"/>
+              </a:spcBef>
+              <a:buClr>
+                <a:srgbClr val="000000"/>
+              </a:buClr>
+              <a:buSzPct val="75000"/>
+              <a:buFont typeface="Symbol" charset="2"/>
+              <a:buChar char=""/>
+            </a:pPr>
+            <a:r>
+              <a:rPr b="0" lang="es-MX" sz="2800" strike="noStrike" u="none">
+                <a:solidFill>
+                  <a:srgbClr val="000000"/>
+                </a:solidFill>
+                <a:uFillTx/>
+                <a:latin typeface="Arial"/>
+              </a:rPr>
+              <a:t>Second Outline Level</a:t>
+            </a:r>
+            <a:endParaRPr b="0" lang="es-MX" sz="2800" strike="noStrike" u="none">
+              <a:solidFill>
+                <a:srgbClr val="000000"/>
+              </a:solidFill>
+              <a:uFillTx/>
+              <a:latin typeface="Arial"/>
+            </a:endParaRPr>
+          </a:p>
+          <a:p>
+            <a:pPr lvl="2" marL="1296000" indent="-288000">
+              <a:spcBef>
+                <a:spcPts val="850"/>
+              </a:spcBef>
+              <a:buClr>
+                <a:srgbClr val="000000"/>
+              </a:buClr>
+              <a:buSzPct val="45000"/>
+              <a:buFont typeface="Wingdings" charset="2"/>
+              <a:buChar char=""/>
+            </a:pPr>
+            <a:r>
+              <a:rPr b="0" lang="es-MX" sz="2400" strike="noStrike" u="none">
+                <a:solidFill>
+                  <a:srgbClr val="000000"/>
+                </a:solidFill>
+                <a:uFillTx/>
+                <a:latin typeface="Arial"/>
+              </a:rPr>
+              <a:t>Third Outline Level</a:t>
+            </a:r>
+            <a:endParaRPr b="0" lang="es-MX" sz="2400" strike="noStrike" u="none">
+              <a:solidFill>
+                <a:srgbClr val="000000"/>
+              </a:solidFill>
+              <a:uFillTx/>
+              <a:latin typeface="Arial"/>
+            </a:endParaRPr>
+          </a:p>
+          <a:p>
+            <a:pPr lvl="3" marL="1728000" indent="-216000">
+              <a:spcBef>
+                <a:spcPts val="567"/>
+              </a:spcBef>
+              <a:buClr>
+                <a:srgbClr val="000000"/>
+              </a:buClr>
+              <a:buSzPct val="75000"/>
+              <a:buFont typeface="Symbol" charset="2"/>
+              <a:buChar char=""/>
+            </a:pPr>
+            <a:r>
+              <a:rPr b="0" lang="es-MX" sz="2000" strike="noStrike" u="none">
+                <a:solidFill>
+                  <a:srgbClr val="000000"/>
+                </a:solidFill>
+                <a:uFillTx/>
+                <a:latin typeface="Arial"/>
+              </a:rPr>
+              <a:t>Fourth Outline Level</a:t>
+            </a:r>
+            <a:endParaRPr b="0" lang="es-MX" sz="2000" strike="noStrike" u="none">
+              <a:solidFill>
+                <a:srgbClr val="000000"/>
+              </a:solidFill>
+              <a:uFillTx/>
+              <a:latin typeface="Arial"/>
+            </a:endParaRPr>
+          </a:p>
+          <a:p>
+            <a:pPr lvl="4" marL="2160000" indent="-216000">
+              <a:spcBef>
+                <a:spcPts val="283"/>
+              </a:spcBef>
+              <a:buClr>
+                <a:srgbClr val="000000"/>
+              </a:buClr>
+              <a:buSzPct val="45000"/>
+              <a:buFont typeface="Wingdings" charset="2"/>
+              <a:buChar char=""/>
+            </a:pPr>
+            <a:r>
+              <a:rPr b="0" lang="es-MX" sz="2000" strike="noStrike" u="none">
+                <a:solidFill>
+                  <a:srgbClr val="000000"/>
+                </a:solidFill>
+                <a:uFillTx/>
+                <a:latin typeface="Arial"/>
+              </a:rPr>
+              <a:t>Fifth Outline Level</a:t>
+            </a:r>
+            <a:endParaRPr b="0" lang="es-MX" sz="2000" strike="noStrike" u="none">
+              <a:solidFill>
+                <a:srgbClr val="000000"/>
+              </a:solidFill>
+              <a:uFillTx/>
+              <a:latin typeface="Arial"/>
+            </a:endParaRPr>
+          </a:p>
+          <a:p>
+            <a:pPr lvl="5" marL="2592000" indent="-216000">
+              <a:spcBef>
+                <a:spcPts val="283"/>
+              </a:spcBef>
+              <a:buClr>
+                <a:srgbClr val="000000"/>
+              </a:buClr>
+              <a:buSzPct val="45000"/>
+              <a:buFont typeface="Wingdings" charset="2"/>
+              <a:buChar char=""/>
+            </a:pPr>
+            <a:r>
+              <a:rPr b="0" lang="es-MX" sz="2000" strike="noStrike" u="none">
+                <a:solidFill>
+                  <a:srgbClr val="000000"/>
+                </a:solidFill>
+                <a:uFillTx/>
+                <a:latin typeface="Arial"/>
+              </a:rPr>
+              <a:t>Sixth Outline Level</a:t>
+            </a:r>
+            <a:endParaRPr b="0" lang="es-MX" sz="2000" strike="noStrike" u="none">
+              <a:solidFill>
+                <a:srgbClr val="000000"/>
+              </a:solidFill>
+              <a:uFillTx/>
+              <a:latin typeface="Arial"/>
+            </a:endParaRPr>
+          </a:p>
+          <a:p>
+            <a:pPr lvl="6" marL="3024000" indent="-216000">
+              <a:spcBef>
+                <a:spcPts val="283"/>
+              </a:spcBef>
+              <a:buClr>
+                <a:srgbClr val="000000"/>
+              </a:buClr>
+              <a:buSzPct val="45000"/>
+              <a:buFont typeface="Wingdings" charset="2"/>
+              <a:buChar char=""/>
+            </a:pPr>
+            <a:r>
+              <a:rPr b="0" lang="es-MX" sz="2000" strike="noStrike" u="none">
+                <a:solidFill>
+                  <a:srgbClr val="000000"/>
+                </a:solidFill>
+                <a:uFillTx/>
+                <a:latin typeface="Arial"/>
+              </a:rPr>
+              <a:t>Seventh Outline Level</a:t>
+            </a:r>
+            <a:endParaRPr b="0" lang="es-MX" sz="2000" strike="noStrike" u="none">
+              <a:solidFill>
+                <a:srgbClr val="000000"/>
+              </a:solidFill>
+              <a:uFillTx/>
+              <a:latin typeface="Arial"/>
             </a:endParaRPr>
           </a:p>
         </p:txBody>
@@ -620,13 +644,13 @@
       <p:sp>
         <p:nvSpPr>
           <p:cNvPr id="5" name=""/>
-          <p:cNvSpPr txBox="1"/>
+          <p:cNvSpPr/>
           <p:nvPr/>
         </p:nvSpPr>
         <p:spPr>
           <a:xfrm>
             <a:off x="1980000" y="540000"/>
-            <a:ext cx="5940000" cy="720000"/>
+            <a:ext cx="5939280" cy="719280"/>
           </a:xfrm>
           <a:prstGeom prst="rect">
             <a:avLst/>
@@ -636,27 +660,39 @@
             <a:noFill/>
           </a:ln>
         </p:spPr>
+        <p:style>
+          <a:lnRef idx="0"/>
+          <a:fillRef idx="0"/>
+          <a:effectRef idx="0"/>
+          <a:fontRef idx="minor"/>
+        </p:style>
         <p:txBody>
           <a:bodyPr lIns="90000" rIns="90000" tIns="45000" bIns="45000" anchor="t">
             <a:noAutofit/>
           </a:bodyPr>
           <a:p>
-            <a:r>
-              <a:rPr b="1" lang="es-MX" sz="1800" strike="noStrike" u="none">
-                <a:solidFill>
-                  <a:srgbClr val="000000"/>
-                </a:solidFill>
-                <a:uFillTx/>
-                <a:latin typeface="Nimbus Sans Narrow"/>
+            <a:pPr>
+              <a:lnSpc>
+                <a:spcPct val="100000"/>
+              </a:lnSpc>
+            </a:pPr>
+            <a:r>
+              <a:rPr b="1" lang="es-MX" sz="2200" strike="noStrike" u="none">
+                <a:solidFill>
+                  <a:srgbClr val="000000"/>
+                </a:solidFill>
+                <a:uFillTx/>
+                <a:latin typeface="Sans Serif Collection"/>
+                <a:ea typeface="DejaVu Sans"/>
               </a:rPr>
               <a:t>Nombre:${nombreAsistente}</a:t>
             </a:r>
-            <a:endParaRPr b="1" lang="es-MX" sz="1800" strike="noStrike" u="none">
-              <a:solidFill>
-                <a:srgbClr val="000000"/>
-              </a:solidFill>
-              <a:uFillTx/>
-              <a:latin typeface="Nimbus Sans Narrow"/>
+            <a:endParaRPr b="0" lang="es-MX" sz="2200" strike="noStrike" u="none">
+              <a:solidFill>
+                <a:srgbClr val="000000"/>
+              </a:solidFill>
+              <a:uFillTx/>
+              <a:latin typeface="Sans Serif Collection"/>
             </a:endParaRPr>
           </a:p>
         </p:txBody>
@@ -664,13 +700,13 @@
       <p:sp>
         <p:nvSpPr>
           <p:cNvPr id="6" name=""/>
-          <p:cNvSpPr txBox="1"/>
+          <p:cNvSpPr/>
           <p:nvPr/>
         </p:nvSpPr>
         <p:spPr>
           <a:xfrm>
             <a:off x="1800000" y="1620000"/>
-            <a:ext cx="5400000" cy="1980000"/>
+            <a:ext cx="5399280" cy="1079640"/>
           </a:xfrm>
           <a:prstGeom prst="rect">
             <a:avLst/>
@@ -680,27 +716,39 @@
             <a:noFill/>
           </a:ln>
         </p:spPr>
+        <p:style>
+          <a:lnRef idx="0"/>
+          <a:fillRef idx="0"/>
+          <a:effectRef idx="0"/>
+          <a:fontRef idx="minor"/>
+        </p:style>
         <p:txBody>
           <a:bodyPr lIns="90000" rIns="90000" tIns="45000" bIns="45000" anchor="t">
             <a:noAutofit/>
           </a:bodyPr>
           <a:p>
-            <a:r>
-              <a:rPr b="0" lang="es-MX" sz="4000" strike="noStrike" u="none">
-                <a:solidFill>
-                  <a:srgbClr val="000000"/>
-                </a:solidFill>
-                <a:uFillTx/>
-                <a:latin typeface="Lato Black"/>
+            <a:pPr>
+              <a:lnSpc>
+                <a:spcPct val="100000"/>
+              </a:lnSpc>
+            </a:pPr>
+            <a:r>
+              <a:rPr b="1" lang="es-MX" sz="4000" strike="noStrike" u="none">
+                <a:solidFill>
+                  <a:srgbClr val="000000"/>
+                </a:solidFill>
+                <a:uFillTx/>
+                <a:latin typeface="Times New Roman"/>
+                <a:ea typeface="DejaVu Sans"/>
               </a:rPr>
               <a:t>${nombreCurso}</a:t>
             </a:r>
-            <a:endParaRPr b="0" lang="es-MX" sz="4000" strike="noStrike" u="none">
-              <a:solidFill>
-                <a:srgbClr val="000000"/>
-              </a:solidFill>
-              <a:uFillTx/>
-              <a:latin typeface="Lato Black"/>
+            <a:endParaRPr b="1" lang="es-MX" sz="4000" strike="noStrike" u="none">
+              <a:solidFill>
+                <a:srgbClr val="000000"/>
+              </a:solidFill>
+              <a:uFillTx/>
+              <a:latin typeface="Times New Roman"/>
             </a:endParaRPr>
           </a:p>
         </p:txBody>

--- a/src/main/resources/static/plantillas/test1Modificado.pptx
+++ b/src/main/resources/static/plantillas/test1Modificado.pptx
@@ -63,7 +63,7 @@
         <p:txBody>
           <a:bodyPr/>
           <a:p>
-            <a:fld id="{C1A3CC1C-E285-4608-8E8E-49946FB985A1}" type="slidenum">
+            <a:fld id="{CA45E9B0-4453-4B94-AA4C-DCB86A17E945}" type="slidenum">
               <a:t>&lt;#&gt;</a:t>
             </a:fld>
           </a:p>
@@ -125,7 +125,7 @@
         <p:spPr>
           <a:xfrm>
             <a:off x="3447360" y="5165280"/>
-            <a:ext cx="3194280" cy="389880"/>
+            <a:ext cx="3192840" cy="388440"/>
           </a:xfrm>
           <a:prstGeom prst="rect">
             <a:avLst/>
@@ -200,7 +200,7 @@
         <p:spPr>
           <a:xfrm>
             <a:off x="7227360" y="5165280"/>
-            <a:ext cx="2347560" cy="389880"/>
+            <a:ext cx="2346120" cy="388440"/>
           </a:xfrm>
           <a:prstGeom prst="rect">
             <a:avLst/>
@@ -242,7 +242,7 @@
                 <a:tab algn="l" pos="0"/>
               </a:tabLst>
             </a:pPr>
-            <a:fld id="{80A34051-97A3-41AB-9201-86D6BDC15AF7}" type="slidenum">
+            <a:fld id="{408BD32B-3575-456E-ABB7-717AF26EB734}" type="slidenum">
               <a:rPr b="0" lang="es-MX" sz="1400" strike="noStrike" u="none">
                 <a:solidFill>
                   <a:srgbClr val="000000"/>
@@ -275,7 +275,7 @@
         <p:spPr>
           <a:xfrm>
             <a:off x="504000" y="5165280"/>
-            <a:ext cx="2347560" cy="389880"/>
+            <a:ext cx="2346120" cy="388440"/>
           </a:xfrm>
           <a:prstGeom prst="rect">
             <a:avLst/>
@@ -643,14 +643,14 @@
       </p:grpSpPr>
       <p:sp>
         <p:nvSpPr>
-          <p:cNvPr id="5" name=""/>
+          <p:cNvPr id="5" name="nombreAsistente"/>
           <p:cNvSpPr/>
           <p:nvPr/>
         </p:nvSpPr>
         <p:spPr>
           <a:xfrm>
             <a:off x="1980000" y="540000"/>
-            <a:ext cx="5939280" cy="719280"/>
+            <a:ext cx="5937840" cy="717840"/>
           </a:xfrm>
           <a:prstGeom prst="rect">
             <a:avLst/>
@@ -692,21 +692,21 @@
                 <a:srgbClr val="000000"/>
               </a:solidFill>
               <a:uFillTx/>
-              <a:latin typeface="Sans Serif Collection"/>
-            </a:endParaRPr>
-          </a:p>
-        </p:txBody>
-      </p:sp>
-      <p:sp>
-        <p:nvSpPr>
-          <p:cNvPr id="6" name=""/>
+              <a:latin typeface="Arial"/>
+            </a:endParaRPr>
+          </a:p>
+        </p:txBody>
+      </p:sp>
+      <p:sp>
+        <p:nvSpPr>
+          <p:cNvPr id="6" name="nombreCurso"/>
           <p:cNvSpPr/>
           <p:nvPr/>
         </p:nvSpPr>
         <p:spPr>
           <a:xfrm>
             <a:off x="1800000" y="1620000"/>
-            <a:ext cx="5399280" cy="1079640"/>
+            <a:ext cx="5397840" cy="1078200"/>
           </a:xfrm>
           <a:prstGeom prst="rect">
             <a:avLst/>
@@ -727,7 +727,7 @@
             <a:noAutofit/>
           </a:bodyPr>
           <a:p>
-            <a:pPr>
+            <a:pPr algn="ctr">
               <a:lnSpc>
                 <a:spcPct val="100000"/>
               </a:lnSpc>
@@ -743,12 +743,12 @@
               </a:rPr>
               <a:t>${nombreCurso}</a:t>
             </a:r>
-            <a:endParaRPr b="1" lang="es-MX" sz="4000" strike="noStrike" u="none">
-              <a:solidFill>
-                <a:srgbClr val="000000"/>
-              </a:solidFill>
-              <a:uFillTx/>
-              <a:latin typeface="Times New Roman"/>
+            <a:endParaRPr b="0" lang="es-MX" sz="4000" strike="noStrike" u="none">
+              <a:solidFill>
+                <a:srgbClr val="000000"/>
+              </a:solidFill>
+              <a:uFillTx/>
+              <a:latin typeface="Arial"/>
             </a:endParaRPr>
           </a:p>
         </p:txBody>
